--- a/Driver Behaviour Classification.pptx
+++ b/Driver Behaviour Classification.pptx
@@ -772,7 +772,7 @@
         </p:nvSpPr>
         <p:spPr>
           <a:xfrm>
-            <a:off x="381300" y="685800"/>
+            <a:off x="381000" y="685800"/>
             <a:ext cx="6096000" cy="3429000"/>
           </a:xfrm>
           <a:custGeom>
@@ -876,7 +876,7 @@
         </p:nvSpPr>
         <p:spPr>
           <a:xfrm>
-            <a:off x="381300" y="685800"/>
+            <a:off x="381000" y="685800"/>
             <a:ext cx="6096000" cy="3429000"/>
           </a:xfrm>
           <a:custGeom>
@@ -939,7 +939,267 @@
               </a:spcAft>
               <a:buNone/>
             </a:pPr>
-            <a:endParaRPr/>
+            <a:r>
+              <a:rPr lang="en-US" sz="1100" b="0" i="0" u="none" strike="noStrike" cap="none" dirty="0">
+                <a:solidFill>
+                  <a:srgbClr val="000000"/>
+                </a:solidFill>
+                <a:effectLst/>
+                <a:latin typeface="Arial"/>
+                <a:ea typeface="Arial"/>
+                <a:cs typeface="Arial"/>
+                <a:sym typeface="Arial"/>
+              </a:rPr>
+              <a:t>Classes: ['</a:t>
+            </a:r>
+            <a:r>
+              <a:rPr lang="en-US" sz="1100" b="0" i="0" u="none" strike="noStrike" cap="none" dirty="0" err="1">
+                <a:solidFill>
+                  <a:srgbClr val="000000"/>
+                </a:solidFill>
+                <a:effectLst/>
+                <a:latin typeface="Arial"/>
+                <a:ea typeface="Arial"/>
+                <a:cs typeface="Arial"/>
+                <a:sym typeface="Arial"/>
+              </a:rPr>
+              <a:t>other_activities</a:t>
+            </a:r>
+            <a:r>
+              <a:rPr lang="en-US" sz="1100" b="0" i="0" u="none" strike="noStrike" cap="none" dirty="0">
+                <a:solidFill>
+                  <a:srgbClr val="000000"/>
+                </a:solidFill>
+                <a:effectLst/>
+                <a:latin typeface="Arial"/>
+                <a:ea typeface="Arial"/>
+                <a:cs typeface="Arial"/>
+                <a:sym typeface="Arial"/>
+              </a:rPr>
+              <a:t>', '</a:t>
+            </a:r>
+            <a:r>
+              <a:rPr lang="en-US" sz="1100" b="0" i="0" u="none" strike="noStrike" cap="none" dirty="0" err="1">
+                <a:solidFill>
+                  <a:srgbClr val="000000"/>
+                </a:solidFill>
+                <a:effectLst/>
+                <a:latin typeface="Arial"/>
+                <a:ea typeface="Arial"/>
+                <a:cs typeface="Arial"/>
+                <a:sym typeface="Arial"/>
+              </a:rPr>
+              <a:t>safe_driving</a:t>
+            </a:r>
+            <a:r>
+              <a:rPr lang="en-US" sz="1100" b="0" i="0" u="none" strike="noStrike" cap="none" dirty="0">
+                <a:solidFill>
+                  <a:srgbClr val="000000"/>
+                </a:solidFill>
+                <a:effectLst/>
+                <a:latin typeface="Arial"/>
+                <a:ea typeface="Arial"/>
+                <a:cs typeface="Arial"/>
+                <a:sym typeface="Arial"/>
+              </a:rPr>
+              <a:t>', '</a:t>
+            </a:r>
+            <a:r>
+              <a:rPr lang="en-US" sz="1100" b="0" i="0" u="none" strike="noStrike" cap="none" dirty="0" err="1">
+                <a:solidFill>
+                  <a:srgbClr val="000000"/>
+                </a:solidFill>
+                <a:effectLst/>
+                <a:latin typeface="Arial"/>
+                <a:ea typeface="Arial"/>
+                <a:cs typeface="Arial"/>
+                <a:sym typeface="Arial"/>
+              </a:rPr>
+              <a:t>talking_phone</a:t>
+            </a:r>
+            <a:r>
+              <a:rPr lang="en-US" sz="1100" b="0" i="0" u="none" strike="noStrike" cap="none" dirty="0">
+                <a:solidFill>
+                  <a:srgbClr val="000000"/>
+                </a:solidFill>
+                <a:effectLst/>
+                <a:latin typeface="Arial"/>
+                <a:ea typeface="Arial"/>
+                <a:cs typeface="Arial"/>
+                <a:sym typeface="Arial"/>
+              </a:rPr>
+              <a:t>', '</a:t>
+            </a:r>
+            <a:r>
+              <a:rPr lang="en-US" sz="1100" b="0" i="0" u="none" strike="noStrike" cap="none" dirty="0" err="1">
+                <a:solidFill>
+                  <a:srgbClr val="000000"/>
+                </a:solidFill>
+                <a:effectLst/>
+                <a:latin typeface="Arial"/>
+                <a:ea typeface="Arial"/>
+                <a:cs typeface="Arial"/>
+                <a:sym typeface="Arial"/>
+              </a:rPr>
+              <a:t>texting_phone</a:t>
+            </a:r>
+            <a:r>
+              <a:rPr lang="en-US" sz="1100" b="0" i="0" u="none" strike="noStrike" cap="none" dirty="0">
+                <a:solidFill>
+                  <a:srgbClr val="000000"/>
+                </a:solidFill>
+                <a:effectLst/>
+                <a:latin typeface="Arial"/>
+                <a:ea typeface="Arial"/>
+                <a:cs typeface="Arial"/>
+                <a:sym typeface="Arial"/>
+              </a:rPr>
+              <a:t>', 'turning’]</a:t>
+            </a:r>
+          </a:p>
+          <a:p>
+            <a:pPr marL="0" lvl="0" indent="0" algn="l" rtl="0">
+              <a:spcBef>
+                <a:spcPts val="0"/>
+              </a:spcBef>
+              <a:spcAft>
+                <a:spcPts val="0"/>
+              </a:spcAft>
+              <a:buNone/>
+            </a:pPr>
+            <a:r>
+              <a:rPr lang="en-US" sz="1100" b="0" i="0" u="none" strike="noStrike" cap="none" dirty="0">
+                <a:solidFill>
+                  <a:srgbClr val="000000"/>
+                </a:solidFill>
+                <a:effectLst/>
+                <a:latin typeface="Arial"/>
+                <a:cs typeface="Arial"/>
+                <a:sym typeface="Arial"/>
+              </a:rPr>
+              <a:t>For VGG16 reasons might be:</a:t>
+            </a:r>
+          </a:p>
+          <a:p>
+            <a:pPr marL="457200" marR="0" lvl="0" indent="-298450" algn="l" defTabSz="914400" rtl="0" eaLnBrk="1" fontAlgn="auto" latinLnBrk="0" hangingPunct="1">
+              <a:lnSpc>
+                <a:spcPct val="100000"/>
+              </a:lnSpc>
+              <a:spcBef>
+                <a:spcPts val="0"/>
+              </a:spcBef>
+              <a:spcAft>
+                <a:spcPts val="0"/>
+              </a:spcAft>
+              <a:buClr>
+                <a:srgbClr val="000000"/>
+              </a:buClr>
+              <a:buSzPts val="1100"/>
+              <a:buFont typeface="Arial"/>
+              <a:buChar char="●"/>
+              <a:tabLst/>
+              <a:defRPr/>
+            </a:pPr>
+            <a:r>
+              <a:rPr lang="en-US" sz="1100" b="0" i="0" u="none" strike="noStrike" cap="none" dirty="0">
+                <a:solidFill>
+                  <a:srgbClr val="000000"/>
+                </a:solidFill>
+                <a:effectLst/>
+                <a:latin typeface="Arial"/>
+                <a:cs typeface="Arial"/>
+                <a:sym typeface="Arial"/>
+              </a:rPr>
+              <a:t>Overfitting</a:t>
+            </a:r>
+            <a:r>
+              <a:rPr lang="en-US" dirty="0"/>
+              <a:t>, don’t judge model on 1 image and may be </a:t>
+            </a:r>
+            <a:r>
+              <a:rPr lang="en-CA" dirty="0"/>
+              <a:t>Dataset diversity is limited.</a:t>
+            </a:r>
+            <a:r>
+              <a:rPr lang="en-US" dirty="0"/>
+              <a:t>.</a:t>
+            </a:r>
+          </a:p>
+          <a:p>
+            <a:pPr marL="0" lvl="0" indent="0" algn="l" rtl="0">
+              <a:spcBef>
+                <a:spcPts val="0"/>
+              </a:spcBef>
+              <a:spcAft>
+                <a:spcPts val="0"/>
+              </a:spcAft>
+              <a:buNone/>
+            </a:pPr>
+            <a:endParaRPr lang="en-US" sz="1100" b="0" i="0" u="none" strike="noStrike" cap="none" dirty="0">
+              <a:solidFill>
+                <a:srgbClr val="000000"/>
+              </a:solidFill>
+              <a:effectLst/>
+              <a:latin typeface="Arial"/>
+              <a:cs typeface="Arial"/>
+              <a:sym typeface="Arial"/>
+            </a:endParaRPr>
+          </a:p>
+          <a:p>
+            <a:pPr marL="0" lvl="0" indent="0" algn="l" rtl="0">
+              <a:spcBef>
+                <a:spcPts val="0"/>
+              </a:spcBef>
+              <a:spcAft>
+                <a:spcPts val="0"/>
+              </a:spcAft>
+              <a:buNone/>
+            </a:pPr>
+            <a:r>
+              <a:rPr lang="en-US" sz="1100" b="0" i="0" u="none" strike="noStrike" cap="none" dirty="0">
+                <a:solidFill>
+                  <a:srgbClr val="000000"/>
+                </a:solidFill>
+                <a:effectLst/>
+                <a:latin typeface="Arial"/>
+                <a:cs typeface="Arial"/>
+                <a:sym typeface="Arial"/>
+              </a:rPr>
+              <a:t>Solutions: </a:t>
+            </a:r>
+            <a:r>
+              <a:rPr lang="en-CA" dirty="0"/>
+              <a:t>Augmentation, tuning </a:t>
+            </a:r>
+            <a:r>
+              <a:rPr lang="en-US" sz="1100" b="0" i="0" u="none" strike="noStrike" cap="none" dirty="0">
+                <a:solidFill>
+                  <a:srgbClr val="000000"/>
+                </a:solidFill>
+                <a:effectLst/>
+                <a:latin typeface="Arial"/>
+                <a:cs typeface="Arial"/>
+                <a:sym typeface="Arial"/>
+              </a:rPr>
+              <a:t>, </a:t>
+            </a:r>
+            <a:r>
+              <a:rPr lang="en-US" dirty="0"/>
+              <a:t>Test on 20–30 unseen images</a:t>
+            </a:r>
+            <a:r>
+              <a:rPr lang="en-CA" dirty="0"/>
+              <a:t>, Collect More Diverse Images</a:t>
+            </a:r>
+            <a:endParaRPr lang="en-US" sz="1100" b="0" i="0" u="none" strike="noStrike" cap="none" dirty="0">
+              <a:solidFill>
+                <a:srgbClr val="000000"/>
+              </a:solidFill>
+              <a:effectLst/>
+              <a:latin typeface="Arial"/>
+              <a:cs typeface="Arial"/>
+              <a:sym typeface="Arial"/>
+            </a:endParaRPr>
           </a:p>
         </p:txBody>
       </p:sp>
@@ -1084,7 +1344,7 @@
         </p:nvSpPr>
         <p:spPr>
           <a:xfrm>
-            <a:off x="381300" y="685800"/>
+            <a:off x="381000" y="685800"/>
             <a:ext cx="6096000" cy="3429000"/>
           </a:xfrm>
           <a:custGeom>
@@ -1188,7 +1448,7 @@
         </p:nvSpPr>
         <p:spPr>
           <a:xfrm>
-            <a:off x="381300" y="685800"/>
+            <a:off x="381000" y="685800"/>
             <a:ext cx="6096000" cy="3429000"/>
           </a:xfrm>
           <a:custGeom>
@@ -1292,7 +1552,7 @@
         </p:nvSpPr>
         <p:spPr>
           <a:xfrm>
-            <a:off x="381300" y="685800"/>
+            <a:off x="381000" y="685800"/>
             <a:ext cx="6096000" cy="3429000"/>
           </a:xfrm>
           <a:custGeom>
@@ -1396,7 +1656,7 @@
         </p:nvSpPr>
         <p:spPr>
           <a:xfrm>
-            <a:off x="381300" y="685800"/>
+            <a:off x="381000" y="685800"/>
             <a:ext cx="6096000" cy="3429000"/>
           </a:xfrm>
           <a:custGeom>
@@ -1500,7 +1760,7 @@
         </p:nvSpPr>
         <p:spPr>
           <a:xfrm>
-            <a:off x="381300" y="685800"/>
+            <a:off x="381000" y="685800"/>
             <a:ext cx="6096000" cy="3429000"/>
           </a:xfrm>
           <a:custGeom>
@@ -1604,7 +1864,7 @@
         </p:nvSpPr>
         <p:spPr>
           <a:xfrm>
-            <a:off x="381300" y="685800"/>
+            <a:off x="381000" y="685800"/>
             <a:ext cx="6096000" cy="3429000"/>
           </a:xfrm>
           <a:custGeom>
@@ -1708,7 +1968,7 @@
         </p:nvSpPr>
         <p:spPr>
           <a:xfrm>
-            <a:off x="381300" y="685800"/>
+            <a:off x="381000" y="685800"/>
             <a:ext cx="6096000" cy="3429000"/>
           </a:xfrm>
           <a:custGeom>
@@ -1875,7 +2135,59 @@
               </a:spcAft>
               <a:buNone/>
             </a:pPr>
-            <a:endParaRPr/>
+            <a:r>
+              <a:rPr lang="en-US" sz="1400" b="0" i="0" u="none" strike="noStrike" cap="none" dirty="0" err="1">
+                <a:solidFill>
+                  <a:srgbClr val="000000"/>
+                </a:solidFill>
+                <a:effectLst/>
+                <a:latin typeface="Arial"/>
+                <a:ea typeface="Arial"/>
+                <a:cs typeface="Arial"/>
+                <a:sym typeface="Arial"/>
+              </a:rPr>
+              <a:t>AlexNet</a:t>
+            </a:r>
+            <a:r>
+              <a:rPr lang="en-US" sz="1400" b="0" i="0" u="none" strike="noStrike" cap="none" dirty="0">
+                <a:solidFill>
+                  <a:srgbClr val="000000"/>
+                </a:solidFill>
+                <a:effectLst/>
+                <a:latin typeface="Arial"/>
+                <a:ea typeface="Arial"/>
+                <a:cs typeface="Arial"/>
+                <a:sym typeface="Arial"/>
+              </a:rPr>
+              <a:t> is a deep learning model that made a big impact in image recognition. It won the ImageNet Large Scale Visual Recognition Challenge (ILSVRC) 2012. Stride refers to the number of pixels a convolutional </a:t>
+            </a:r>
+            <a:r>
+              <a:rPr lang="en-US" sz="1400" b="0" i="0" u="none" strike="noStrike" cap="none" dirty="0" err="1">
+                <a:solidFill>
+                  <a:srgbClr val="000000"/>
+                </a:solidFill>
+                <a:effectLst/>
+                <a:latin typeface="Arial"/>
+                <a:ea typeface="Arial"/>
+                <a:cs typeface="Arial"/>
+                <a:sym typeface="Arial"/>
+              </a:rPr>
+              <a:t>filteror</a:t>
+            </a:r>
+            <a:r>
+              <a:rPr lang="en-US" sz="1400" b="0" i="0" u="none" strike="noStrike" cap="none" dirty="0">
+                <a:solidFill>
+                  <a:srgbClr val="000000"/>
+                </a:solidFill>
+                <a:effectLst/>
+                <a:latin typeface="Arial"/>
+                <a:ea typeface="Arial"/>
+                <a:cs typeface="Arial"/>
+                <a:sym typeface="Arial"/>
+              </a:rPr>
+              <a:t> pooling window moves as it slides. </a:t>
+            </a:r>
+            <a:endParaRPr sz="1400" dirty="0"/>
           </a:p>
         </p:txBody>
       </p:sp>
@@ -38971,7 +39283,7 @@
         </p:nvSpPr>
         <p:spPr>
           <a:xfrm>
-            <a:off x="847850" y="1559575"/>
+            <a:off x="895557" y="2020751"/>
             <a:ext cx="7668300" cy="766500"/>
           </a:xfrm>
           <a:prstGeom prst="rect">
@@ -38999,150 +39311,16 @@
               <a:buNone/>
             </a:pPr>
             <a:r>
-              <a:rPr lang="en" sz="4200">
+              <a:rPr lang="en" sz="4200" dirty="0">
                 <a:solidFill>
                   <a:srgbClr val="38761D"/>
                 </a:solidFill>
               </a:rPr>
               <a:t>Driver Behaviour Classification</a:t>
             </a:r>
-            <a:endParaRPr sz="4200">
+            <a:endParaRPr sz="4200" dirty="0">
               <a:solidFill>
                 <a:srgbClr val="38761D"/>
-              </a:solidFill>
-            </a:endParaRPr>
-          </a:p>
-        </p:txBody>
-      </p:sp>
-      <p:sp>
-        <p:nvSpPr>
-          <p:cNvPr id="365" name="Google Shape;365;p52"/>
-          <p:cNvSpPr txBox="1">
-            <a:spLocks noGrp="1"/>
-          </p:cNvSpPr>
-          <p:nvPr>
-            <p:ph type="subTitle" idx="1"/>
-          </p:nvPr>
-        </p:nvSpPr>
-        <p:spPr>
-          <a:xfrm>
-            <a:off x="2656275" y="3078850"/>
-            <a:ext cx="3311700" cy="1323600"/>
-          </a:xfrm>
-          <a:prstGeom prst="rect">
-            <a:avLst/>
-          </a:prstGeom>
-        </p:spPr>
-        <p:txBody>
-          <a:bodyPr spcFirstLastPara="1" wrap="square" lIns="91425" tIns="91425" rIns="91425" bIns="91425" anchor="t" anchorCtr="0">
-            <a:spAutoFit/>
-          </a:bodyPr>
-          <a:lstStyle/>
-          <a:p>
-            <a:pPr marL="0" lvl="0" indent="0" algn="l" rtl="0">
-              <a:spcBef>
-                <a:spcPts val="0"/>
-              </a:spcBef>
-              <a:spcAft>
-                <a:spcPts val="0"/>
-              </a:spcAft>
-              <a:buNone/>
-            </a:pPr>
-            <a:r>
-              <a:rPr lang="en" sz="2000">
-                <a:solidFill>
-                  <a:srgbClr val="000000"/>
-                </a:solidFill>
-              </a:rPr>
-              <a:t>Team Members</a:t>
-            </a:r>
-            <a:endParaRPr sz="2000">
-              <a:solidFill>
-                <a:srgbClr val="000000"/>
-              </a:solidFill>
-            </a:endParaRPr>
-          </a:p>
-          <a:p>
-            <a:pPr marL="457200" lvl="0" indent="-342900" algn="l" rtl="0">
-              <a:spcBef>
-                <a:spcPts val="0"/>
-              </a:spcBef>
-              <a:spcAft>
-                <a:spcPts val="0"/>
-              </a:spcAft>
-              <a:buClr>
-                <a:srgbClr val="000000"/>
-              </a:buClr>
-              <a:buSzPts val="1800"/>
-              <a:buChar char="●"/>
-            </a:pPr>
-            <a:r>
-              <a:rPr lang="en" sz="1800">
-                <a:solidFill>
-                  <a:srgbClr val="000000"/>
-                </a:solidFill>
-              </a:rPr>
-              <a:t>S M Haque</a:t>
-            </a:r>
-            <a:endParaRPr sz="1800">
-              <a:solidFill>
-                <a:srgbClr val="000000"/>
-              </a:solidFill>
-            </a:endParaRPr>
-          </a:p>
-          <a:p>
-            <a:pPr marL="457200" lvl="0" indent="-342900" algn="l" rtl="0">
-              <a:spcBef>
-                <a:spcPts val="0"/>
-              </a:spcBef>
-              <a:spcAft>
-                <a:spcPts val="0"/>
-              </a:spcAft>
-              <a:buClr>
-                <a:srgbClr val="000000"/>
-              </a:buClr>
-              <a:buSzPts val="1800"/>
-              <a:buChar char="●"/>
-            </a:pPr>
-            <a:r>
-              <a:rPr lang="en" sz="1800">
-                <a:solidFill>
-                  <a:srgbClr val="000000"/>
-                </a:solidFill>
-              </a:rPr>
-              <a:t>Kavya</a:t>
-            </a:r>
-            <a:endParaRPr sz="1800">
-              <a:solidFill>
-                <a:srgbClr val="000000"/>
-              </a:solidFill>
-            </a:endParaRPr>
-          </a:p>
-          <a:p>
-            <a:pPr marL="457200" lvl="0" indent="-342900" algn="l" rtl="0">
-              <a:spcBef>
-                <a:spcPts val="0"/>
-              </a:spcBef>
-              <a:spcAft>
-                <a:spcPts val="0"/>
-              </a:spcAft>
-              <a:buClr>
-                <a:srgbClr val="000000"/>
-              </a:buClr>
-              <a:buSzPts val="1800"/>
-              <a:buChar char="●"/>
-            </a:pPr>
-            <a:r>
-              <a:rPr lang="en" sz="1800">
-                <a:solidFill>
-                  <a:srgbClr val="000000"/>
-                </a:solidFill>
-              </a:rPr>
-              <a:t>Zabi</a:t>
-            </a:r>
-            <a:endParaRPr sz="1800">
-              <a:solidFill>
-                <a:srgbClr val="000000"/>
               </a:solidFill>
             </a:endParaRPr>
           </a:p>
@@ -40008,8 +40186,8 @@
         </p:nvSpPr>
         <p:spPr>
           <a:xfrm>
-            <a:off x="311700" y="1402776"/>
-            <a:ext cx="7831500" cy="3506976"/>
+            <a:off x="311700" y="1402775"/>
+            <a:ext cx="7831500" cy="3740700"/>
           </a:xfrm>
           <a:prstGeom prst="rect">
             <a:avLst/>
@@ -40039,7 +40217,7 @@
               <a:buChar char="●"/>
             </a:pPr>
             <a:r>
-              <a:rPr lang="en" sz="1600" dirty="0">
+              <a:rPr lang="en" sz="1600">
                 <a:solidFill>
                   <a:srgbClr val="000000"/>
                 </a:solidFill>
@@ -40050,7 +40228,7 @@
               </a:rPr>
               <a:t>Developed a deep learning model to classify driver behavior from images.</a:t>
             </a:r>
-            <a:endParaRPr sz="1600" dirty="0">
+            <a:endParaRPr sz="1600">
               <a:solidFill>
                 <a:srgbClr val="000000"/>
               </a:solidFill>
@@ -40073,7 +40251,7 @@
               </a:spcAft>
               <a:buNone/>
             </a:pPr>
-            <a:endParaRPr sz="1000" dirty="0">
+            <a:endParaRPr sz="1000">
               <a:solidFill>
                 <a:srgbClr val="000000"/>
               </a:solidFill>
@@ -40102,7 +40280,7 @@
               <a:buChar char="●"/>
             </a:pPr>
             <a:r>
-              <a:rPr lang="en" sz="1600" dirty="0">
+              <a:rPr lang="en" sz="1600">
                 <a:solidFill>
                   <a:srgbClr val="000000"/>
                 </a:solidFill>
@@ -40113,7 +40291,7 @@
               </a:rPr>
               <a:t>Model learned meaningful patterns but showed some overfitting on validation data.</a:t>
             </a:r>
-            <a:endParaRPr sz="1600" dirty="0">
+            <a:endParaRPr sz="1600">
               <a:solidFill>
                 <a:srgbClr val="000000"/>
               </a:solidFill>
@@ -40136,7 +40314,7 @@
               </a:spcAft>
               <a:buNone/>
             </a:pPr>
-            <a:endParaRPr sz="1000" dirty="0">
+            <a:endParaRPr sz="1000">
               <a:solidFill>
                 <a:srgbClr val="000000"/>
               </a:solidFill>
@@ -40165,7 +40343,7 @@
               <a:buChar char="●"/>
             </a:pPr>
             <a:r>
-              <a:rPr lang="en" sz="1600" dirty="0">
+              <a:rPr lang="en" sz="1600">
                 <a:solidFill>
                   <a:srgbClr val="000000"/>
                 </a:solidFill>
@@ -40176,7 +40354,7 @@
               </a:rPr>
               <a:t>Transfer learning improved performance and generalization.</a:t>
             </a:r>
-            <a:endParaRPr sz="1600" dirty="0">
+            <a:endParaRPr sz="1600">
               <a:solidFill>
                 <a:srgbClr val="000000"/>
               </a:solidFill>
@@ -40199,7 +40377,7 @@
               </a:spcAft>
               <a:buNone/>
             </a:pPr>
-            <a:endParaRPr sz="1000" dirty="0">
+            <a:endParaRPr sz="1000">
               <a:solidFill>
                 <a:srgbClr val="000000"/>
               </a:solidFill>
@@ -40228,7 +40406,7 @@
               <a:buChar char="●"/>
             </a:pPr>
             <a:r>
-              <a:rPr lang="en" sz="1600" dirty="0">
+              <a:rPr lang="en" sz="1600">
                 <a:solidFill>
                   <a:srgbClr val="000000"/>
                 </a:solidFill>
@@ -40239,7 +40417,7 @@
               </a:rPr>
               <a:t>The system shows strong potential for real-time driver monitoring and road safety applications.</a:t>
             </a:r>
-            <a:endParaRPr sz="1600" dirty="0">
+            <a:endParaRPr sz="1600">
               <a:solidFill>
                 <a:srgbClr val="000000"/>
               </a:solidFill>
@@ -40262,7 +40440,7 @@
               </a:spcAft>
               <a:buNone/>
             </a:pPr>
-            <a:endParaRPr sz="1000" dirty="0">
+            <a:endParaRPr sz="1000">
               <a:solidFill>
                 <a:srgbClr val="000000"/>
               </a:solidFill>
@@ -40291,7 +40469,7 @@
               <a:buChar char="●"/>
             </a:pPr>
             <a:r>
-              <a:rPr lang="en" sz="1600" dirty="0">
+              <a:rPr lang="en" sz="1600">
                 <a:solidFill>
                   <a:srgbClr val="000000"/>
                 </a:solidFill>
@@ -40305,7 +40483,7 @@
               </a:rPr>
               <a:t>Testing on completely new external images revealed some performance variation. This highlights the importance of dataset diversity and real-world variability in improving generalization.</a:t>
             </a:r>
-            <a:endParaRPr sz="1600" dirty="0">
+            <a:endParaRPr sz="1600">
               <a:solidFill>
                 <a:srgbClr val="000000"/>
               </a:solidFill>
@@ -40331,7 +40509,7 @@
               </a:spcAft>
               <a:buNone/>
             </a:pPr>
-            <a:endParaRPr sz="1000" dirty="0">
+            <a:endParaRPr sz="1000">
               <a:solidFill>
                 <a:srgbClr val="000000"/>
               </a:solidFill>
@@ -40363,7 +40541,7 @@
               <a:buChar char="●"/>
             </a:pPr>
             <a:r>
-              <a:rPr lang="en" sz="1600" dirty="0">
+              <a:rPr lang="en" sz="1600">
                 <a:solidFill>
                   <a:srgbClr val="000000"/>
                 </a:solidFill>
@@ -40377,7 +40555,7 @@
               </a:rPr>
               <a:t>Future improvements may include stronger data augmentation and expanding the dataset with more diverse driving conditions.</a:t>
             </a:r>
-            <a:endParaRPr sz="1600" dirty="0">
+            <a:endParaRPr sz="1600">
               <a:solidFill>
                 <a:srgbClr val="000000"/>
               </a:solidFill>
@@ -40400,7 +40578,7 @@
               </a:spcAft>
               <a:buNone/>
             </a:pPr>
-            <a:endParaRPr sz="1600" dirty="0">
+            <a:endParaRPr sz="1600">
               <a:solidFill>
                 <a:schemeClr val="dk1"/>
               </a:solidFill>
@@ -40420,7 +40598,7 @@
               </a:spcAft>
               <a:buNone/>
             </a:pPr>
-            <a:endParaRPr dirty="0">
+            <a:endParaRPr>
               <a:latin typeface="Times"/>
               <a:ea typeface="Times"/>
               <a:cs typeface="Times"/>
@@ -40555,7 +40733,7 @@
         </p:spPr>
         <p:txBody>
           <a:bodyPr spcFirstLastPara="1" wrap="square" lIns="91425" tIns="91425" rIns="91425" bIns="91425" anchor="b" anchorCtr="0">
-            <a:normAutofit fontScale="90000"/>
+            <a:normAutofit/>
           </a:bodyPr>
           <a:lstStyle/>
           <a:p>
@@ -42263,8 +42441,8 @@
         </p:nvSpPr>
         <p:spPr>
           <a:xfrm>
-            <a:off x="917375" y="144252"/>
-            <a:ext cx="7310700" cy="615600"/>
+            <a:off x="917375" y="144251"/>
+            <a:ext cx="7310700" cy="591555"/>
           </a:xfrm>
           <a:prstGeom prst="rect">
             <a:avLst/>
@@ -42289,7 +42467,7 @@
               <a:buNone/>
             </a:pPr>
             <a:r>
-              <a:rPr lang="en" sz="3800">
+              <a:rPr lang="en" sz="3800" dirty="0">
                 <a:solidFill>
                   <a:srgbClr val="000000"/>
                 </a:solidFill>
@@ -42300,7 +42478,7 @@
               </a:rPr>
               <a:t>VGG16 Transfer Learning</a:t>
             </a:r>
-            <a:endParaRPr sz="3800">
+            <a:endParaRPr sz="3800" dirty="0">
               <a:solidFill>
                 <a:srgbClr val="000000"/>
               </a:solidFill>
@@ -42994,7 +43172,7 @@
         </p:spPr>
         <p:txBody>
           <a:bodyPr spcFirstLastPara="1" wrap="square" lIns="91425" tIns="91425" rIns="91425" bIns="91425" anchor="t" anchorCtr="0">
-            <a:normAutofit fontScale="62500" lnSpcReduction="20000"/>
+            <a:normAutofit fontScale="70000" lnSpcReduction="20000"/>
           </a:bodyPr>
           <a:lstStyle/>
           <a:p>
@@ -43613,7 +43791,7 @@
               <a:buNone/>
             </a:pPr>
             <a:r>
-              <a:rPr lang="en" sz="1600">
+              <a:rPr lang="en" sz="1600" dirty="0">
                 <a:solidFill>
                   <a:srgbClr val="1F1F1F"/>
                 </a:solidFill>
@@ -43627,7 +43805,7 @@
               </a:rPr>
               <a:t>It became famous for its ability to classify images accurately.</a:t>
             </a:r>
-            <a:endParaRPr sz="3200">
+            <a:endParaRPr sz="3200" dirty="0">
               <a:latin typeface="Times New Roman"/>
               <a:ea typeface="Times New Roman"/>
               <a:cs typeface="Times New Roman"/>
@@ -43645,7 +43823,7 @@
         <p:spPr>
           <a:xfrm>
             <a:off x="373075" y="1799600"/>
-            <a:ext cx="5321400" cy="2031295"/>
+            <a:ext cx="5321400" cy="2447400"/>
           </a:xfrm>
           <a:prstGeom prst="rect">
             <a:avLst/>
@@ -43783,23 +43961,20 @@
                 <a:cs typeface="Times New Roman"/>
                 <a:sym typeface="Times New Roman"/>
               </a:rPr>
-              <a:t>Max-Pooling uses a 3×3 filter with stride 2 which improved the performance</a:t>
+              <a:t>Max-Pooling uses a 3×3 filter with stride 2 which improved performance by reducing top-1 error by 0.4% and top-5 error by 0.3% compared to non-overlapping pooling.</a:t>
             </a:r>
-            <a:r>
-              <a:rPr lang="en-US" sz="1600" dirty="0">
-                <a:solidFill>
-                  <a:srgbClr val="1F1F1F"/>
-                </a:solidFill>
-                <a:highlight>
-                  <a:srgbClr val="FFFFFF"/>
-                </a:highlight>
-                <a:latin typeface="Times New Roman"/>
-                <a:ea typeface="Times New Roman"/>
-                <a:cs typeface="Times New Roman"/>
-                <a:sym typeface="Times New Roman"/>
-              </a:rPr>
-              <a:t>.</a:t>
-            </a:r>
+            <a:endParaRPr sz="1600" dirty="0">
+              <a:solidFill>
+                <a:srgbClr val="1F1F1F"/>
+              </a:solidFill>
+              <a:highlight>
+                <a:srgbClr val="FFFFFF"/>
+              </a:highlight>
+              <a:latin typeface="Times New Roman"/>
+              <a:ea typeface="Times New Roman"/>
+              <a:cs typeface="Times New Roman"/>
+              <a:sym typeface="Times New Roman"/>
+            </a:endParaRPr>
           </a:p>
           <a:p>
             <a:pPr marL="457200" lvl="0" indent="-330200" algn="l" rtl="0">
@@ -43820,7 +43995,7 @@
               <a:buChar char="●"/>
             </a:pPr>
             <a:r>
-              <a:rPr lang="en-US" sz="1600" dirty="0">
+              <a:rPr lang="en" sz="1600" dirty="0">
                 <a:solidFill>
                   <a:srgbClr val="1F1F1F"/>
                 </a:solidFill>
@@ -43834,6 +44009,18 @@
               </a:rPr>
               <a:t>Followed by 2 fully connected layers each using dropout to prevent overfitting.</a:t>
             </a:r>
+            <a:endParaRPr sz="1600" dirty="0">
+              <a:solidFill>
+                <a:srgbClr val="1F1F1F"/>
+              </a:solidFill>
+              <a:highlight>
+                <a:srgbClr val="FFFFFF"/>
+              </a:highlight>
+              <a:latin typeface="Times New Roman"/>
+              <a:ea typeface="Times New Roman"/>
+              <a:cs typeface="Times New Roman"/>
+              <a:sym typeface="Times New Roman"/>
+            </a:endParaRPr>
           </a:p>
           <a:p>
             <a:pPr marL="457200" lvl="0" indent="-330200" algn="l" rtl="0">
@@ -43919,7 +44106,7 @@
         </p:nvSpPr>
         <p:spPr>
           <a:xfrm>
-            <a:off x="1701047" y="3999851"/>
+            <a:off x="1783425" y="4356725"/>
             <a:ext cx="2136900" cy="507900"/>
           </a:xfrm>
           <a:prstGeom prst="rect">
@@ -43958,7 +44145,7 @@
                 <a:cs typeface="Courier New"/>
                 <a:sym typeface="Courier New"/>
               </a:rPr>
-              <a:t>Test Accuracy: 0.9637</a:t>
+              <a:t>Test Accuracy: 0.9237</a:t>
             </a:r>
             <a:endParaRPr sz="1050" dirty="0">
               <a:solidFill>
@@ -44115,7 +44302,7 @@
         </p:blipFill>
         <p:spPr>
           <a:xfrm>
-            <a:off x="892900" y="3054375"/>
+            <a:off x="892900" y="3066875"/>
             <a:ext cx="7019725" cy="1961275"/>
           </a:xfrm>
           <a:prstGeom prst="rect">
